--- a/brand/spark-talent-client-proposal.pptx
+++ b/brand/spark-talent-client-proposal.pptx
@@ -113,33 +113,33 @@
   <p:extLst>
     <p:ext uri="{521415D9-36F7-43E2-AB2F-B90AF26B5E84}">
       <p14:sectionLst xmlns:p14="http://schemas.microsoft.com/office/powerpoint/2010/main">
-        <p14:section name="Cover" id="{7d4aea81-2aaa-6ba1-5095-9905b698b25b}">
+        <p14:section name="Cover" id="{34771c78-5868-3a3b-18d0-dad5f17bea51}">
           <p14:sldIdLst>
             <p14:sldId id="256"/>
           </p14:sldIdLst>
         </p14:section>
-        <p14:section name="Understanding" id="{8f9144cc-7e6a-96f3-cd47-f88f85fb7d1e}">
+        <p14:section name="Understanding" id="{d75b674b-a668-8313-c469-398564657a11}">
           <p14:sldIdLst>
             <p14:sldId id="257"/>
             <p14:sldId id="258"/>
           </p14:sldIdLst>
         </p14:section>
-        <p14:section name="Approach" id="{a5a95df5-e78b-104d-527d-9eacd2e6ec5e}">
+        <p14:section name="Approach" id="{1cbdb89a-b29d-e712-a26d-5aad8f452921}">
           <p14:sldIdLst>
             <p14:sldId id="259"/>
           </p14:sldIdLst>
         </p14:section>
-        <p14:section name="Proof" id="{1feeae4e-d3e3-7b7e-dd5d-0537a03f63bb}">
+        <p14:section name="Proof" id="{234a4d6c-5cf0-943a-143b-3e9d3d9a0c8a}">
           <p14:sldIdLst>
             <p14:sldId id="260"/>
           </p14:sldIdLst>
         </p14:section>
-        <p14:section name="Commercials" id="{f7eccac6-28fe-03c4-aeb0-77745298ae1f}">
+        <p14:section name="Commercials" id="{385e9ac9-1290-d46b-8dce-efe4a438e805}">
           <p14:sldIdLst>
             <p14:sldId id="261"/>
           </p14:sldIdLst>
         </p14:section>
-        <p14:section name="Close" id="{2ad92a62-0246-20be-f821-b211aa43917c}">
+        <p14:section name="Close" id="{752fd4f9-338c-89aa-c805-448d0b15e259}">
           <p14:sldIdLst>
             <p14:sldId id="262"/>
           </p14:sldIdLst>
@@ -2725,7 +2725,7 @@
                   <a:srgbClr val="6F6A5D"/>
                 </a:solidFill>
               </a:rPr>
-              <a:t>Say it back in their words. If they do not recognise it, the rest of the deck does not land.</a:t>
+              <a:t>Say it back in their words. If they do not recognize it, the rest of the deck does not land.</a:t>
             </a:r>
             <a:endParaRPr lang="en-US" sz="1250" dirty="0"/>
           </a:p>
